--- a/slides/2-4_pulse_oximeter/2-4_pulse_oximeter.pptx
+++ b/slides/2-4_pulse_oximeter/2-4_pulse_oximeter.pptx
@@ -2272,7 +2272,7 @@
           <a:ln/>
         </p:spPr>
         <p:txBody>
-          <a:bodyPr wrap="square" lIns="0" tIns="0" rIns="0" bIns="0" rtlCol="0" anchor="ctr"/>
+          <a:bodyPr wrap="none" lIns="0" tIns="0" rIns="0" bIns="0" rtlCol="0" anchor="ctr"/>
           <a:lstStyle/>
           <a:p>
             <a:pPr algn="ctr" indent="0" marL="0">
@@ -2315,7 +2315,7 @@
           <a:ln/>
         </p:spPr>
         <p:txBody>
-          <a:bodyPr wrap="square" lIns="0" tIns="0" rIns="0" bIns="0" rtlCol="0" anchor="ctr"/>
+          <a:bodyPr wrap="none" lIns="0" tIns="0" rIns="0" bIns="0" rtlCol="0" anchor="ctr"/>
           <a:lstStyle/>
           <a:p>
             <a:pPr algn="ctr" indent="0" marL="0">
@@ -2358,7 +2358,7 @@
           <a:ln/>
         </p:spPr>
         <p:txBody>
-          <a:bodyPr wrap="square" lIns="0" tIns="0" rIns="0" bIns="0" rtlCol="0" anchor="ctr"/>
+          <a:bodyPr wrap="none" lIns="0" tIns="0" rIns="0" bIns="0" rtlCol="0" anchor="ctr"/>
           <a:lstStyle/>
           <a:p>
             <a:pPr algn="ctr" indent="0" marL="0">
@@ -2401,7 +2401,7 @@
           <a:ln/>
         </p:spPr>
         <p:txBody>
-          <a:bodyPr wrap="square" lIns="0" tIns="0" rIns="0" bIns="0" rtlCol="0" anchor="ctr"/>
+          <a:bodyPr wrap="none" lIns="0" tIns="0" rIns="0" bIns="0" rtlCol="0" anchor="ctr"/>
           <a:lstStyle/>
           <a:p>
             <a:pPr algn="ctr" indent="0" marL="0">
@@ -2444,7 +2444,7 @@
           <a:ln/>
         </p:spPr>
         <p:txBody>
-          <a:bodyPr wrap="square" lIns="0" tIns="0" rIns="0" bIns="0" rtlCol="0" anchor="ctr"/>
+          <a:bodyPr wrap="none" lIns="0" tIns="0" rIns="0" bIns="0" rtlCol="0" anchor="ctr"/>
           <a:lstStyle/>
           <a:p>
             <a:pPr algn="ctr" indent="0" marL="0">
@@ -2827,7 +2827,7 @@
           <a:ln/>
         </p:spPr>
         <p:txBody>
-          <a:bodyPr wrap="square" lIns="0" tIns="0" rIns="0" bIns="0" rtlCol="0" anchor="ctr"/>
+          <a:bodyPr wrap="none" lIns="0" tIns="0" rIns="0" bIns="0" rtlCol="0" anchor="ctr"/>
           <a:lstStyle/>
           <a:p>
             <a:pPr algn="ctr" indent="0" marL="0">
@@ -2870,7 +2870,7 @@
           <a:ln/>
         </p:spPr>
         <p:txBody>
-          <a:bodyPr wrap="square" lIns="0" tIns="0" rIns="0" bIns="0" rtlCol="0" anchor="ctr"/>
+          <a:bodyPr wrap="none" lIns="0" tIns="0" rIns="0" bIns="0" rtlCol="0" anchor="ctr"/>
           <a:lstStyle/>
           <a:p>
             <a:pPr algn="ctr" indent="0" marL="0">
@@ -2913,7 +2913,7 @@
           <a:ln/>
         </p:spPr>
         <p:txBody>
-          <a:bodyPr wrap="square" lIns="0" tIns="0" rIns="0" bIns="0" rtlCol="0" anchor="ctr"/>
+          <a:bodyPr wrap="none" lIns="0" tIns="0" rIns="0" bIns="0" rtlCol="0" anchor="ctr"/>
           <a:lstStyle/>
           <a:p>
             <a:pPr algn="ctr" indent="0" marL="0">
@@ -2956,7 +2956,7 @@
           <a:ln/>
         </p:spPr>
         <p:txBody>
-          <a:bodyPr wrap="square" lIns="0" tIns="0" rIns="0" bIns="0" rtlCol="0" anchor="ctr"/>
+          <a:bodyPr wrap="none" lIns="0" tIns="0" rIns="0" bIns="0" rtlCol="0" anchor="ctr"/>
           <a:lstStyle/>
           <a:p>
             <a:pPr algn="ctr" indent="0" marL="0">
@@ -2999,7 +2999,7 @@
           <a:ln/>
         </p:spPr>
         <p:txBody>
-          <a:bodyPr wrap="square" lIns="0" tIns="0" rIns="0" bIns="0" rtlCol="0" anchor="ctr"/>
+          <a:bodyPr wrap="none" lIns="0" tIns="0" rIns="0" bIns="0" rtlCol="0" anchor="ctr"/>
           <a:lstStyle/>
           <a:p>
             <a:pPr algn="ctr" indent="0" marL="0">
@@ -3892,7 +3892,7 @@
           <a:ln/>
         </p:spPr>
         <p:txBody>
-          <a:bodyPr wrap="square" lIns="0" tIns="0" rIns="0" bIns="0" rtlCol="0" anchor="ctr"/>
+          <a:bodyPr wrap="none" lIns="0" tIns="0" rIns="0" bIns="0" rtlCol="0" anchor="ctr"/>
           <a:lstStyle/>
           <a:p>
             <a:pPr algn="ctr" indent="0" marL="0">
@@ -3935,7 +3935,7 @@
           <a:ln/>
         </p:spPr>
         <p:txBody>
-          <a:bodyPr wrap="square" lIns="0" tIns="0" rIns="0" bIns="0" rtlCol="0" anchor="ctr"/>
+          <a:bodyPr wrap="none" lIns="0" tIns="0" rIns="0" bIns="0" rtlCol="0" anchor="ctr"/>
           <a:lstStyle/>
           <a:p>
             <a:pPr algn="ctr" indent="0" marL="0">
@@ -3978,7 +3978,7 @@
           <a:ln/>
         </p:spPr>
         <p:txBody>
-          <a:bodyPr wrap="square" lIns="0" tIns="0" rIns="0" bIns="0" rtlCol="0" anchor="ctr"/>
+          <a:bodyPr wrap="none" lIns="0" tIns="0" rIns="0" bIns="0" rtlCol="0" anchor="ctr"/>
           <a:lstStyle/>
           <a:p>
             <a:pPr algn="ctr" indent="0" marL="0">
@@ -4021,7 +4021,7 @@
           <a:ln/>
         </p:spPr>
         <p:txBody>
-          <a:bodyPr wrap="square" lIns="0" tIns="0" rIns="0" bIns="0" rtlCol="0" anchor="ctr"/>
+          <a:bodyPr wrap="none" lIns="0" tIns="0" rIns="0" bIns="0" rtlCol="0" anchor="ctr"/>
           <a:lstStyle/>
           <a:p>
             <a:pPr algn="ctr" indent="0" marL="0">
@@ -4064,7 +4064,7 @@
           <a:ln/>
         </p:spPr>
         <p:txBody>
-          <a:bodyPr wrap="square" lIns="0" tIns="0" rIns="0" bIns="0" rtlCol="0" anchor="ctr"/>
+          <a:bodyPr wrap="none" lIns="0" tIns="0" rIns="0" bIns="0" rtlCol="0" anchor="ctr"/>
           <a:lstStyle/>
           <a:p>
             <a:pPr algn="ctr" indent="0" marL="0">
@@ -5420,7 +5420,7 @@
           <a:ln/>
         </p:spPr>
         <p:txBody>
-          <a:bodyPr wrap="square" lIns="0" tIns="0" rIns="0" bIns="0" rtlCol="0" anchor="ctr"/>
+          <a:bodyPr wrap="none" lIns="0" tIns="0" rIns="0" bIns="0" rtlCol="0" anchor="ctr"/>
           <a:lstStyle/>
           <a:p>
             <a:pPr algn="ctr" indent="0" marL="0">
@@ -5463,7 +5463,7 @@
           <a:ln/>
         </p:spPr>
         <p:txBody>
-          <a:bodyPr wrap="square" lIns="0" tIns="0" rIns="0" bIns="0" rtlCol="0" anchor="ctr"/>
+          <a:bodyPr wrap="none" lIns="0" tIns="0" rIns="0" bIns="0" rtlCol="0" anchor="ctr"/>
           <a:lstStyle/>
           <a:p>
             <a:pPr algn="ctr" indent="0" marL="0">
@@ -5506,7 +5506,7 @@
           <a:ln/>
         </p:spPr>
         <p:txBody>
-          <a:bodyPr wrap="square" lIns="0" tIns="0" rIns="0" bIns="0" rtlCol="0" anchor="ctr"/>
+          <a:bodyPr wrap="none" lIns="0" tIns="0" rIns="0" bIns="0" rtlCol="0" anchor="ctr"/>
           <a:lstStyle/>
           <a:p>
             <a:pPr algn="ctr" indent="0" marL="0">
@@ -5549,7 +5549,7 @@
           <a:ln/>
         </p:spPr>
         <p:txBody>
-          <a:bodyPr wrap="square" lIns="0" tIns="0" rIns="0" bIns="0" rtlCol="0" anchor="ctr"/>
+          <a:bodyPr wrap="none" lIns="0" tIns="0" rIns="0" bIns="0" rtlCol="0" anchor="ctr"/>
           <a:lstStyle/>
           <a:p>
             <a:pPr algn="ctr" indent="0" marL="0">
@@ -5592,7 +5592,7 @@
           <a:ln/>
         </p:spPr>
         <p:txBody>
-          <a:bodyPr wrap="square" lIns="0" tIns="0" rIns="0" bIns="0" rtlCol="0" anchor="ctr"/>
+          <a:bodyPr wrap="none" lIns="0" tIns="0" rIns="0" bIns="0" rtlCol="0" anchor="ctr"/>
           <a:lstStyle/>
           <a:p>
             <a:pPr algn="ctr" indent="0" marL="0">
@@ -6083,7 +6083,7 @@
           <a:ln/>
         </p:spPr>
         <p:txBody>
-          <a:bodyPr wrap="square" lIns="0" tIns="0" rIns="0" bIns="0" rtlCol="0" anchor="ctr"/>
+          <a:bodyPr wrap="none" lIns="0" tIns="0" rIns="0" bIns="0" rtlCol="0" anchor="ctr"/>
           <a:lstStyle/>
           <a:p>
             <a:pPr algn="ctr" indent="0" marL="0">
@@ -6126,7 +6126,7 @@
           <a:ln/>
         </p:spPr>
         <p:txBody>
-          <a:bodyPr wrap="square" lIns="0" tIns="0" rIns="0" bIns="0" rtlCol="0" anchor="ctr"/>
+          <a:bodyPr wrap="none" lIns="0" tIns="0" rIns="0" bIns="0" rtlCol="0" anchor="ctr"/>
           <a:lstStyle/>
           <a:p>
             <a:pPr algn="ctr" indent="0" marL="0">
@@ -6169,7 +6169,7 @@
           <a:ln/>
         </p:spPr>
         <p:txBody>
-          <a:bodyPr wrap="square" lIns="0" tIns="0" rIns="0" bIns="0" rtlCol="0" anchor="ctr"/>
+          <a:bodyPr wrap="none" lIns="0" tIns="0" rIns="0" bIns="0" rtlCol="0" anchor="ctr"/>
           <a:lstStyle/>
           <a:p>
             <a:pPr algn="ctr" indent="0" marL="0">
@@ -6212,7 +6212,7 @@
           <a:ln/>
         </p:spPr>
         <p:txBody>
-          <a:bodyPr wrap="square" lIns="0" tIns="0" rIns="0" bIns="0" rtlCol="0" anchor="ctr"/>
+          <a:bodyPr wrap="none" lIns="0" tIns="0" rIns="0" bIns="0" rtlCol="0" anchor="ctr"/>
           <a:lstStyle/>
           <a:p>
             <a:pPr algn="ctr" indent="0" marL="0">
@@ -6255,7 +6255,7 @@
           <a:ln/>
         </p:spPr>
         <p:txBody>
-          <a:bodyPr wrap="square" lIns="0" tIns="0" rIns="0" bIns="0" rtlCol="0" anchor="ctr"/>
+          <a:bodyPr wrap="none" lIns="0" tIns="0" rIns="0" bIns="0" rtlCol="0" anchor="ctr"/>
           <a:lstStyle/>
           <a:p>
             <a:pPr algn="ctr" indent="0" marL="0">
@@ -7010,7 +7010,7 @@
           <a:ln/>
         </p:spPr>
         <p:txBody>
-          <a:bodyPr wrap="square" lIns="0" tIns="0" rIns="0" bIns="0" rtlCol="0" anchor="ctr"/>
+          <a:bodyPr wrap="none" lIns="0" tIns="0" rIns="0" bIns="0" rtlCol="0" anchor="ctr"/>
           <a:lstStyle/>
           <a:p>
             <a:pPr algn="ctr" indent="0" marL="0">
@@ -7053,7 +7053,7 @@
           <a:ln/>
         </p:spPr>
         <p:txBody>
-          <a:bodyPr wrap="square" lIns="0" tIns="0" rIns="0" bIns="0" rtlCol="0" anchor="ctr"/>
+          <a:bodyPr wrap="none" lIns="0" tIns="0" rIns="0" bIns="0" rtlCol="0" anchor="ctr"/>
           <a:lstStyle/>
           <a:p>
             <a:pPr algn="ctr" indent="0" marL="0">
@@ -7096,7 +7096,7 @@
           <a:ln/>
         </p:spPr>
         <p:txBody>
-          <a:bodyPr wrap="square" lIns="0" tIns="0" rIns="0" bIns="0" rtlCol="0" anchor="ctr"/>
+          <a:bodyPr wrap="none" lIns="0" tIns="0" rIns="0" bIns="0" rtlCol="0" anchor="ctr"/>
           <a:lstStyle/>
           <a:p>
             <a:pPr algn="ctr" indent="0" marL="0">
@@ -7139,7 +7139,7 @@
           <a:ln/>
         </p:spPr>
         <p:txBody>
-          <a:bodyPr wrap="square" lIns="0" tIns="0" rIns="0" bIns="0" rtlCol="0" anchor="ctr"/>
+          <a:bodyPr wrap="none" lIns="0" tIns="0" rIns="0" bIns="0" rtlCol="0" anchor="ctr"/>
           <a:lstStyle/>
           <a:p>
             <a:pPr algn="ctr" indent="0" marL="0">
@@ -7182,7 +7182,7 @@
           <a:ln/>
         </p:spPr>
         <p:txBody>
-          <a:bodyPr wrap="square" lIns="0" tIns="0" rIns="0" bIns="0" rtlCol="0" anchor="ctr"/>
+          <a:bodyPr wrap="none" lIns="0" tIns="0" rIns="0" bIns="0" rtlCol="0" anchor="ctr"/>
           <a:lstStyle/>
           <a:p>
             <a:pPr algn="ctr" indent="0" marL="0">
@@ -8123,7 +8123,7 @@
           <a:ln/>
         </p:spPr>
         <p:txBody>
-          <a:bodyPr wrap="square" lIns="0" tIns="0" rIns="0" bIns="0" rtlCol="0" anchor="ctr"/>
+          <a:bodyPr wrap="none" lIns="0" tIns="0" rIns="0" bIns="0" rtlCol="0" anchor="ctr"/>
           <a:lstStyle/>
           <a:p>
             <a:pPr algn="ctr" indent="0" marL="0">
@@ -8166,7 +8166,7 @@
           <a:ln/>
         </p:spPr>
         <p:txBody>
-          <a:bodyPr wrap="square" lIns="0" tIns="0" rIns="0" bIns="0" rtlCol="0" anchor="ctr"/>
+          <a:bodyPr wrap="none" lIns="0" tIns="0" rIns="0" bIns="0" rtlCol="0" anchor="ctr"/>
           <a:lstStyle/>
           <a:p>
             <a:pPr algn="ctr" indent="0" marL="0">
@@ -8209,7 +8209,7 @@
           <a:ln/>
         </p:spPr>
         <p:txBody>
-          <a:bodyPr wrap="square" lIns="0" tIns="0" rIns="0" bIns="0" rtlCol="0" anchor="ctr"/>
+          <a:bodyPr wrap="none" lIns="0" tIns="0" rIns="0" bIns="0" rtlCol="0" anchor="ctr"/>
           <a:lstStyle/>
           <a:p>
             <a:pPr algn="ctr" indent="0" marL="0">
@@ -8252,7 +8252,7 @@
           <a:ln/>
         </p:spPr>
         <p:txBody>
-          <a:bodyPr wrap="square" lIns="0" tIns="0" rIns="0" bIns="0" rtlCol="0" anchor="ctr"/>
+          <a:bodyPr wrap="none" lIns="0" tIns="0" rIns="0" bIns="0" rtlCol="0" anchor="ctr"/>
           <a:lstStyle/>
           <a:p>
             <a:pPr algn="ctr" indent="0" marL="0">
@@ -8295,7 +8295,7 @@
           <a:ln/>
         </p:spPr>
         <p:txBody>
-          <a:bodyPr wrap="square" lIns="0" tIns="0" rIns="0" bIns="0" rtlCol="0" anchor="ctr"/>
+          <a:bodyPr wrap="none" lIns="0" tIns="0" rIns="0" bIns="0" rtlCol="0" anchor="ctr"/>
           <a:lstStyle/>
           <a:p>
             <a:pPr algn="ctr" indent="0" marL="0">
@@ -9757,7 +9757,7 @@
           <a:ln/>
         </p:spPr>
         <p:txBody>
-          <a:bodyPr wrap="square" lIns="0" tIns="0" rIns="0" bIns="0" rtlCol="0" anchor="ctr"/>
+          <a:bodyPr wrap="none" lIns="0" tIns="0" rIns="0" bIns="0" rtlCol="0" anchor="ctr"/>
           <a:lstStyle/>
           <a:p>
             <a:pPr algn="ctr" indent="0" marL="0">
@@ -9800,7 +9800,7 @@
           <a:ln/>
         </p:spPr>
         <p:txBody>
-          <a:bodyPr wrap="square" lIns="0" tIns="0" rIns="0" bIns="0" rtlCol="0" anchor="ctr"/>
+          <a:bodyPr wrap="none" lIns="0" tIns="0" rIns="0" bIns="0" rtlCol="0" anchor="ctr"/>
           <a:lstStyle/>
           <a:p>
             <a:pPr algn="ctr" indent="0" marL="0">
@@ -9843,7 +9843,7 @@
           <a:ln/>
         </p:spPr>
         <p:txBody>
-          <a:bodyPr wrap="square" lIns="0" tIns="0" rIns="0" bIns="0" rtlCol="0" anchor="ctr"/>
+          <a:bodyPr wrap="none" lIns="0" tIns="0" rIns="0" bIns="0" rtlCol="0" anchor="ctr"/>
           <a:lstStyle/>
           <a:p>
             <a:pPr algn="ctr" indent="0" marL="0">
@@ -9886,7 +9886,7 @@
           <a:ln/>
         </p:spPr>
         <p:txBody>
-          <a:bodyPr wrap="square" lIns="0" tIns="0" rIns="0" bIns="0" rtlCol="0" anchor="ctr"/>
+          <a:bodyPr wrap="none" lIns="0" tIns="0" rIns="0" bIns="0" rtlCol="0" anchor="ctr"/>
           <a:lstStyle/>
           <a:p>
             <a:pPr algn="ctr" indent="0" marL="0">
@@ -9929,7 +9929,7 @@
           <a:ln/>
         </p:spPr>
         <p:txBody>
-          <a:bodyPr wrap="square" lIns="0" tIns="0" rIns="0" bIns="0" rtlCol="0" anchor="ctr"/>
+          <a:bodyPr wrap="none" lIns="0" tIns="0" rIns="0" bIns="0" rtlCol="0" anchor="ctr"/>
           <a:lstStyle/>
           <a:p>
             <a:pPr algn="ctr" indent="0" marL="0">
@@ -10954,7 +10954,7 @@
           <a:ln/>
         </p:spPr>
         <p:txBody>
-          <a:bodyPr wrap="square" lIns="0" tIns="0" rIns="0" bIns="0" rtlCol="0" anchor="ctr"/>
+          <a:bodyPr wrap="none" lIns="0" tIns="0" rIns="0" bIns="0" rtlCol="0" anchor="ctr"/>
           <a:lstStyle/>
           <a:p>
             <a:pPr algn="ctr" indent="0" marL="0">
@@ -10997,7 +10997,7 @@
           <a:ln/>
         </p:spPr>
         <p:txBody>
-          <a:bodyPr wrap="square" lIns="0" tIns="0" rIns="0" bIns="0" rtlCol="0" anchor="ctr"/>
+          <a:bodyPr wrap="none" lIns="0" tIns="0" rIns="0" bIns="0" rtlCol="0" anchor="ctr"/>
           <a:lstStyle/>
           <a:p>
             <a:pPr algn="ctr" indent="0" marL="0">
@@ -11040,7 +11040,7 @@
           <a:ln/>
         </p:spPr>
         <p:txBody>
-          <a:bodyPr wrap="square" lIns="0" tIns="0" rIns="0" bIns="0" rtlCol="0" anchor="ctr"/>
+          <a:bodyPr wrap="none" lIns="0" tIns="0" rIns="0" bIns="0" rtlCol="0" anchor="ctr"/>
           <a:lstStyle/>
           <a:p>
             <a:pPr algn="ctr" indent="0" marL="0">
@@ -11083,7 +11083,7 @@
           <a:ln/>
         </p:spPr>
         <p:txBody>
-          <a:bodyPr wrap="square" lIns="0" tIns="0" rIns="0" bIns="0" rtlCol="0" anchor="ctr"/>
+          <a:bodyPr wrap="none" lIns="0" tIns="0" rIns="0" bIns="0" rtlCol="0" anchor="ctr"/>
           <a:lstStyle/>
           <a:p>
             <a:pPr algn="ctr" indent="0" marL="0">
@@ -11126,7 +11126,7 @@
           <a:ln/>
         </p:spPr>
         <p:txBody>
-          <a:bodyPr wrap="square" lIns="0" tIns="0" rIns="0" bIns="0" rtlCol="0" anchor="ctr"/>
+          <a:bodyPr wrap="none" lIns="0" tIns="0" rIns="0" bIns="0" rtlCol="0" anchor="ctr"/>
           <a:lstStyle/>
           <a:p>
             <a:pPr algn="ctr" indent="0" marL="0">
